--- a/catalog/samples/scr.pptx
+++ b/catalog/samples/scr.pptx
@@ -1272,7 +1272,7 @@
           </a:p>
           <a:p>
             <a:r>
-              <a:t>  "template_sha256": "1adf3163d45e744a04ec1858eed575748b50fbbd47308cbad7b4ca6d8c06a50b"</a:t>
+              <a:t>  "template_sha256": "8850eea2b96e10890e1ab3d0394d48b911afa31b6eae6e9d39872799c927dc00"</a:t>
             </a:r>
           </a:p>
           <a:p>
